--- a/ST-1/decks/st1-us-advertiser.pptx
+++ b/ST-1/decks/st1-us-advertiser.pptx
@@ -511,7 +511,7 @@
           <a:lstStyle/>
           <a:p>
             <a:r>
-              <a:t>Ivory, navy and one muted gold accent. Product close-ups and paired everyday scenes. Calm, precise copy. No internal personnel humor.</a:t>
+              <a:t>Ivory background, dark navy type, cobalt advertiser accent. Product close-ups and paired everyday scenes. Calm, precise copy. No internal personnel humor.</a:t>
             </a:r>
           </a:p>
           <a:p/>
